--- a/skills/presentations/assets/pptx/templates/05-procurement-proposal.pptx
+++ b/skills/presentations/assets/pptx/templates/05-procurement-proposal.pptx
@@ -5,15 +5,15 @@
     <p:sldMasterId xmlns:r="http://schemas.openxmlformats.org/officeDocument/2006/relationships" id="2147483648" r:id="rId1"/>
   </p:sldMasterIdLst>
   <p:notesMasterIdLst>
-    <p:notesMasterId r:id="R07de1624af4f4b42"/>
+    <p:notesMasterId r:id="R0990483ebb2341b3"/>
   </p:notesMasterIdLst>
   <p:sldIdLst>
-    <p:sldId id="256" r:id="R2ffe87ddb96b4f2c"/>
-    <p:sldId id="257" r:id="R632d7b6b0aa14e20"/>
-    <p:sldId id="258" r:id="Raa05be2a5f7e40f5"/>
-    <p:sldId id="259" r:id="R6de05439a8654aa3"/>
-    <p:sldId id="260" r:id="R74e79243a07e4b93"/>
-    <p:sldId id="261" r:id="Rc90e8fda8ee94ba5"/>
+    <p:sldId id="256" r:id="Rf8c1c3a7771b487c"/>
+    <p:sldId id="257" r:id="Rfc8041724a8d454a"/>
+    <p:sldId id="258" r:id="Rd2b01dbec70c4b0e"/>
+    <p:sldId id="259" r:id="Re893b312af08442b"/>
+    <p:sldId id="260" r:id="R8c6651ae27514745"/>
+    <p:sldId id="261" r:id="Rc361f142ad774987"/>
   </p:sldIdLst>
   <p:sldSz cx="12192000" cy="6858000"/>
   <p:notesSz cx="6858000" cy="9144000"/>

--- a/skills/presentations/assets/pptx/templates/05-procurement-proposal.pptx
+++ b/skills/presentations/assets/pptx/templates/05-procurement-proposal.pptx
@@ -5,15 +5,16 @@
     <p:sldMasterId xmlns:r="http://schemas.openxmlformats.org/officeDocument/2006/relationships" id="2147483648" r:id="rId1"/>
   </p:sldMasterIdLst>
   <p:notesMasterIdLst>
-    <p:notesMasterId r:id="R0990483ebb2341b3"/>
+    <p:notesMasterId r:id="R01ce6cbc5c384df2"/>
   </p:notesMasterIdLst>
   <p:sldIdLst>
-    <p:sldId id="256" r:id="Rf8c1c3a7771b487c"/>
-    <p:sldId id="257" r:id="Rfc8041724a8d454a"/>
-    <p:sldId id="258" r:id="Rd2b01dbec70c4b0e"/>
-    <p:sldId id="259" r:id="Re893b312af08442b"/>
-    <p:sldId id="260" r:id="R8c6651ae27514745"/>
-    <p:sldId id="261" r:id="Rc361f142ad774987"/>
+    <p:sldId id="256" r:id="R24bdff5cd3d24af9"/>
+    <p:sldId id="257" r:id="Ref721088bfaa423a"/>
+    <p:sldId id="258" r:id="Rcd0cc0f103ec4fef"/>
+    <p:sldId id="259" r:id="Rc24cd4e228c945da"/>
+    <p:sldId id="260" r:id="Rd7ab62c974c74663"/>
+    <p:sldId id="261" r:id="R00c6cf6de7514917"/>
+    <p:sldId id="262" r:id="R954d1ad311fd4c59"/>
   </p:sldIdLst>
   <p:sldSz cx="12192000" cy="6858000"/>
   <p:notesSz cx="6858000" cy="9144000"/>
@@ -479,6 +480,24 @@
               <a:t>Cover (template). Procurement proposal</a:t>
             </a:r>
           </a:p>
+          <a:p xmlns:a="http://schemas.openxmlformats.org/drawingml/2006/main">
+            <a:r>
+              <a:rPr lang="en-US"/>
+              <a:t/>
+            </a:r>
+          </a:p>
+          <a:p xmlns:a="http://schemas.openxmlformats.org/drawingml/2006/main">
+            <a:r>
+              <a:rPr lang="en-US"/>
+              <a:t>Vendor TCO options + procurement lead time</a:t>
+            </a:r>
+          </a:p>
+          <a:p xmlns:a="http://schemas.openxmlformats.org/drawingml/2006/main">
+            <a:r>
+              <a:rPr lang="en-US"/>
+              <a:t>Industry EDA/tool buy case shape (must/should + lead time): https://www.em-tools.io/engineering-manager-responsibilities/headcount-planning</a:t>
+            </a:r>
+          </a:p>
         </p:txBody>
       </p:sp>
     </p:spTree>
@@ -531,7 +550,13 @@
           <a:p xmlns:a="http://schemas.openxmlformats.org/drawingml/2006/main">
             <a:r>
               <a:rPr lang="en-US"/>
-              <a:t>Never set decide-by equal to need-by.</a:t>
+              <a:t>Vendor TCO options + procurement lead time</a:t>
+            </a:r>
+          </a:p>
+          <a:p xmlns:a="http://schemas.openxmlformats.org/drawingml/2006/main">
+            <a:r>
+              <a:rPr lang="en-US"/>
+              <a:t>Industry EDA/tool buy case shape (must/should + lead time): https://www.em-tools.io/engineering-manager-responsibilities/headcount-planning</a:t>
             </a:r>
           </a:p>
         </p:txBody>
@@ -586,7 +611,7 @@
           <a:p xmlns:a="http://schemas.openxmlformats.org/drawingml/2006/main">
             <a:r>
               <a:rPr lang="en-US"/>
-              <a:t>Must list drives fair comparison.</a:t>
+              <a:t>Never set decide-by equal to need-by.</a:t>
             </a:r>
           </a:p>
         </p:txBody>
@@ -641,7 +666,7 @@
           <a:p xmlns:a="http://schemas.openxmlformats.org/drawingml/2006/main">
             <a:r>
               <a:rPr lang="en-US"/>
-              <a:t>Adoption is part of the ask.</a:t>
+              <a:t>Must list drives fair comparison.</a:t>
             </a:r>
           </a:p>
         </p:txBody>
@@ -696,7 +721,7 @@
           <a:p xmlns:a="http://schemas.openxmlformats.org/drawingml/2006/main">
             <a:r>
               <a:rPr lang="en-US"/>
-              <a:t>Walk trade-offs; land recommendation.</a:t>
+              <a:t>Adoption is part of the ask.</a:t>
             </a:r>
           </a:p>
         </p:txBody>
@@ -710,6 +735,61 @@
 </file>
 
 <file path=ppt/notesSlides/notesSlide6.xml><?xml version="1.0" encoding="utf-8"?>
+<p:notes xmlns:p="http://schemas.openxmlformats.org/presentationml/2006/main">
+  <p:cSld>
+    <p:spTree>
+      <p:nvGrpSpPr>
+        <p:cNvPr id="1" name=""/>
+        <p:cNvGrpSpPr/>
+        <p:nvPr/>
+      </p:nvGrpSpPr>
+      <p:grpSpPr>
+        <a:xfrm xmlns:a="http://schemas.openxmlformats.org/drawingml/2006/main"/>
+      </p:grpSpPr>
+      <p:sp>
+        <p:nvSpPr>
+          <p:cNvPr id="2" name="Slide Image Placeholder 1"/>
+          <p:cNvSpPr/>
+          <p:nvPr>
+            <p:ph type="sldImg" idx="0"/>
+          </p:nvPr>
+        </p:nvSpPr>
+        <p:spPr/>
+        <p:txBody>
+          <a:bodyPr xmlns:a="http://schemas.openxmlformats.org/drawingml/2006/main"/>
+          <a:lstStyle xmlns:a="http://schemas.openxmlformats.org/drawingml/2006/main"/>
+          <a:p xmlns:a="http://schemas.openxmlformats.org/drawingml/2006/main"/>
+        </p:txBody>
+      </p:sp>
+      <p:sp>
+        <p:nvSpPr>
+          <p:cNvPr id="3" name="Notes Placeholder 2"/>
+          <p:cNvSpPr/>
+          <p:nvPr>
+            <p:ph type="body" idx="1"/>
+          </p:nvPr>
+        </p:nvSpPr>
+        <p:spPr/>
+        <p:txBody>
+          <a:bodyPr xmlns:a="http://schemas.openxmlformats.org/drawingml/2006/main"/>
+          <a:lstStyle xmlns:a="http://schemas.openxmlformats.org/drawingml/2006/main"/>
+          <a:p xmlns:a="http://schemas.openxmlformats.org/drawingml/2006/main">
+            <a:r>
+              <a:rPr lang="en-US"/>
+              <a:t>Walk trade-offs; land recommendation.</a:t>
+            </a:r>
+          </a:p>
+        </p:txBody>
+      </p:sp>
+    </p:spTree>
+  </p:cSld>
+  <p:clrMapOvr>
+    <a:masterClrMapping xmlns:a="http://schemas.openxmlformats.org/drawingml/2006/main"/>
+  </p:clrMapOvr>
+</p:notes>
+</file>
+
+<file path=ppt/notesSlides/notesSlide7.xml><?xml version="1.0" encoding="utf-8"?>
 <p:notes xmlns:p="http://schemas.openxmlformats.org/presentationml/2006/main">
   <p:cSld>
     <p:spTree>
@@ -1079,8 +1159,8 @@
         </p:nvSpPr>
         <p:spPr>
           <a:xfrm xmlns:a="http://schemas.openxmlformats.org/drawingml/2006/main">
-            <a:off x="504000" y="1008000"/>
-            <a:ext cx="11088000" cy="324000"/>
+            <a:off x="504000" y="936000"/>
+            <a:ext cx="11088000" cy="306000"/>
           </a:xfrm>
           <a:prstGeom xmlns:a="http://schemas.openxmlformats.org/drawingml/2006/main" prst="rect">
             <a:avLst/>
@@ -1111,8 +1191,8 @@
         </p:nvSpPr>
         <p:spPr>
           <a:xfrm xmlns:a="http://schemas.openxmlformats.org/drawingml/2006/main">
-            <a:off x="504000" y="1440000"/>
-            <a:ext cx="11088000" cy="936000"/>
+            <a:off x="504000" y="1332000"/>
+            <a:ext cx="11088000" cy="900000"/>
           </a:xfrm>
           <a:prstGeom xmlns:a="http://schemas.openxmlformats.org/drawingml/2006/main" prst="rect">
             <a:avLst/>
@@ -1123,7 +1203,7 @@
           <a:lstStyle xmlns:a="http://schemas.openxmlformats.org/drawingml/2006/main"/>
           <a:p xmlns:a="http://schemas.openxmlformats.org/drawingml/2006/main">
             <a:r>
-              <a:rPr lang="en-US" sz="3400" b="1">
+              <a:rPr lang="en-US" sz="3200" b="1">
                 <a:solidFill>
                   <a:srgbClr val="FFFFFF"/>
                 </a:solidFill>
@@ -1143,8 +1223,8 @@
         </p:nvSpPr>
         <p:spPr>
           <a:xfrm xmlns:a="http://schemas.openxmlformats.org/drawingml/2006/main">
-            <a:off x="504000" y="2520000"/>
-            <a:ext cx="11088000" cy="720000"/>
+            <a:off x="504000" y="2340000"/>
+            <a:ext cx="11088000" cy="648000"/>
           </a:xfrm>
           <a:prstGeom xmlns:a="http://schemas.openxmlformats.org/drawingml/2006/main" prst="rect">
             <a:avLst/>
@@ -1155,7 +1235,7 @@
           <a:lstStyle xmlns:a="http://schemas.openxmlformats.org/drawingml/2006/main"/>
           <a:p xmlns:a="http://schemas.openxmlformats.org/drawingml/2006/main">
             <a:r>
-              <a:rPr lang="en-US" sz="1700" b="0">
+              <a:rPr lang="en-US" sz="1600" b="0">
                 <a:solidFill>
                   <a:srgbClr val="CADCFC"/>
                 </a:solidFill>
@@ -1170,6 +1250,38 @@
       <p:sp>
         <p:nvSpPr>
           <p:cNvPr id="100003" name="TextBox 4"/>
+          <p:cNvSpPr txBox="1"/>
+          <p:nvPr/>
+        </p:nvSpPr>
+        <p:spPr>
+          <a:xfrm xmlns:a="http://schemas.openxmlformats.org/drawingml/2006/main">
+            <a:off x="504000" y="3240000"/>
+            <a:ext cx="11088000" cy="576000"/>
+          </a:xfrm>
+          <a:prstGeom xmlns:a="http://schemas.openxmlformats.org/drawingml/2006/main" prst="rect">
+            <a:avLst/>
+          </a:prstGeom>
+        </p:spPr>
+        <p:txBody>
+          <a:bodyPr xmlns:a="http://schemas.openxmlformats.org/drawingml/2006/main"/>
+          <a:lstStyle xmlns:a="http://schemas.openxmlformats.org/drawingml/2006/main"/>
+          <a:p xmlns:a="http://schemas.openxmlformats.org/drawingml/2006/main">
+            <a:r>
+              <a:rPr lang="en-US" sz="1400" b="0">
+                <a:solidFill>
+                  <a:srgbClr val="A0C4E8"/>
+                </a:solidFill>
+                <a:latin typeface="Calibri"/>
+                <a:ea typeface="Calibri"/>
+              </a:rPr>
+              <a:t>Pattern: Vendor TCO options + procurement lead time</a:t>
+            </a:r>
+          </a:p>
+        </p:txBody>
+      </p:sp>
+      <p:sp>
+        <p:nvSpPr>
+          <p:cNvPr id="100004" name="TextBox 5"/>
           <p:cNvSpPr txBox="1"/>
           <p:nvPr/>
         </p:nvSpPr>
@@ -1205,6 +1317,255 @@
 </file>
 
 <file path=ppt/slides/slide2.xml><?xml version="1.0" encoding="utf-8"?>
+<p:sld xmlns:p="http://schemas.openxmlformats.org/presentationml/2006/main">
+  <p:cSld name="Pattern provenance">
+    <p:bg>
+      <p:bgPr>
+        <a:solidFill xmlns:a="http://schemas.openxmlformats.org/drawingml/2006/main">
+          <a:srgbClr val="F4F7FC"/>
+        </a:solidFill>
+      </p:bgPr>
+    </p:bg>
+    <p:spTree>
+      <p:nvGrpSpPr>
+        <p:cNvPr id="1" name=""/>
+        <p:cNvGrpSpPr/>
+        <p:nvPr/>
+      </p:nvGrpSpPr>
+      <p:grpSpPr/>
+      <p:sp>
+        <p:nvSpPr>
+          <p:cNvPr id="100005" name="TextBox 1"/>
+          <p:cNvSpPr txBox="1"/>
+          <p:nvPr/>
+        </p:nvSpPr>
+        <p:spPr>
+          <a:xfrm xmlns:a="http://schemas.openxmlformats.org/drawingml/2006/main">
+            <a:off x="504000" y="270000"/>
+            <a:ext cx="11088000" cy="270000"/>
+          </a:xfrm>
+          <a:prstGeom xmlns:a="http://schemas.openxmlformats.org/drawingml/2006/main" prst="rect">
+            <a:avLst/>
+          </a:prstGeom>
+        </p:spPr>
+        <p:txBody>
+          <a:bodyPr xmlns:a="http://schemas.openxmlformats.org/drawingml/2006/main"/>
+          <a:lstStyle xmlns:a="http://schemas.openxmlformats.org/drawingml/2006/main"/>
+          <a:p xmlns:a="http://schemas.openxmlformats.org/drawingml/2006/main">
+            <a:r>
+              <a:rPr lang="en-US" sz="1100" b="1">
+                <a:solidFill>
+                  <a:srgbClr val="2B6CB0"/>
+                </a:solidFill>
+                <a:latin typeface="Calibri"/>
+                <a:ea typeface="Calibri"/>
+              </a:rPr>
+              <a:t>WHERE THIS DECK SHAPE COMES FROM</a:t>
+            </a:r>
+          </a:p>
+        </p:txBody>
+      </p:sp>
+      <p:sp>
+        <p:nvSpPr>
+          <p:cNvPr id="100006" name="TextBox 2"/>
+          <p:cNvSpPr txBox="1"/>
+          <p:nvPr/>
+        </p:nvSpPr>
+        <p:spPr>
+          <a:xfrm xmlns:a="http://schemas.openxmlformats.org/drawingml/2006/main">
+            <a:off x="504000" y="558000"/>
+            <a:ext cx="11088000" cy="612000"/>
+          </a:xfrm>
+          <a:prstGeom xmlns:a="http://schemas.openxmlformats.org/drawingml/2006/main" prst="rect">
+            <a:avLst/>
+          </a:prstGeom>
+        </p:spPr>
+        <p:txBody>
+          <a:bodyPr xmlns:a="http://schemas.openxmlformats.org/drawingml/2006/main"/>
+          <a:lstStyle xmlns:a="http://schemas.openxmlformats.org/drawingml/2006/main"/>
+          <a:p xmlns:a="http://schemas.openxmlformats.org/drawingml/2006/main">
+            <a:r>
+              <a:rPr lang="en-US" sz="2800" b="1">
+                <a:solidFill>
+                  <a:srgbClr val="1A202C"/>
+                </a:solidFill>
+                <a:latin typeface="Calibri"/>
+                <a:ea typeface="Calibri"/>
+              </a:rPr>
+              <a:t>Pattern provenance</a:t>
+            </a:r>
+          </a:p>
+        </p:txBody>
+      </p:sp>
+      <p:sp>
+        <p:nvSpPr>
+          <p:cNvPr id="100007" name="TextBox 3"/>
+          <p:cNvSpPr txBox="1"/>
+          <p:nvPr/>
+        </p:nvSpPr>
+        <p:spPr>
+          <a:xfrm xmlns:a="http://schemas.openxmlformats.org/drawingml/2006/main">
+            <a:off x="504000" y="1260000"/>
+            <a:ext cx="11088000" cy="4860000"/>
+          </a:xfrm>
+          <a:prstGeom xmlns:a="http://schemas.openxmlformats.org/drawingml/2006/main" prst="rect">
+            <a:avLst/>
+          </a:prstGeom>
+          <a:solidFill xmlns:a="http://schemas.openxmlformats.org/drawingml/2006/main">
+            <a:srgbClr val="FFFFFF"/>
+          </a:solidFill>
+        </p:spPr>
+        <p:txBody>
+          <a:bodyPr xmlns:a="http://schemas.openxmlformats.org/drawingml/2006/main"/>
+          <a:lstStyle xmlns:a="http://schemas.openxmlformats.org/drawingml/2006/main"/>
+          <a:p xmlns:a="http://schemas.openxmlformats.org/drawingml/2006/main">
+            <a:r>
+              <a:rPr lang="en-US" sz="1500" b="0">
+                <a:solidFill>
+                  <a:srgbClr val="1A202C"/>
+                </a:solidFill>
+                <a:latin typeface="Calibri"/>
+                <a:ea typeface="Calibri"/>
+              </a:rPr>
+              <a:t>Public pattern (structure only — not a confidential company deck):</a:t>
+            </a:r>
+          </a:p>
+          <a:p xmlns:a="http://schemas.openxmlformats.org/drawingml/2006/main">
+            <a:r>
+              <a:rPr lang="en-US" sz="1500" b="0">
+                <a:solidFill>
+                  <a:srgbClr val="1A202C"/>
+                </a:solidFill>
+                <a:latin typeface="Calibri"/>
+                <a:ea typeface="Calibri"/>
+              </a:rPr>
+              <a:t/>
+            </a:r>
+          </a:p>
+          <a:p xmlns:a="http://schemas.openxmlformats.org/drawingml/2006/main">
+            <a:r>
+              <a:rPr lang="en-US" sz="1500" b="0">
+                <a:solidFill>
+                  <a:srgbClr val="1A202C"/>
+                </a:solidFill>
+                <a:latin typeface="Calibri"/>
+                <a:ea typeface="Calibri"/>
+              </a:rPr>
+              <a:t>Vendor TCO options + procurement lead time</a:t>
+            </a:r>
+          </a:p>
+          <a:p xmlns:a="http://schemas.openxmlformats.org/drawingml/2006/main">
+            <a:r>
+              <a:rPr lang="en-US" sz="1500" b="0">
+                <a:solidFill>
+                  <a:srgbClr val="1A202C"/>
+                </a:solidFill>
+                <a:latin typeface="Calibri"/>
+                <a:ea typeface="Calibri"/>
+              </a:rPr>
+              <a:t/>
+            </a:r>
+          </a:p>
+          <a:p xmlns:a="http://schemas.openxmlformats.org/drawingml/2006/main">
+            <a:r>
+              <a:rPr lang="en-US" sz="1500" b="0">
+                <a:solidFill>
+                  <a:srgbClr val="1A202C"/>
+                </a:solidFill>
+                <a:latin typeface="Calibri"/>
+                <a:ea typeface="Calibri"/>
+              </a:rPr>
+              <a:t>• Industry EDA/tool buy case shape (must/should + lead time)</a:t>
+            </a:r>
+          </a:p>
+          <a:p xmlns:a="http://schemas.openxmlformats.org/drawingml/2006/main">
+            <a:r>
+              <a:rPr lang="en-US" sz="1500" b="0">
+                <a:solidFill>
+                  <a:srgbClr val="1A202C"/>
+                </a:solidFill>
+                <a:latin typeface="Calibri"/>
+                <a:ea typeface="Calibri"/>
+              </a:rPr>
+              <a:t>  https://www.em-tools.io/engineering-manager-responsibilities/headcount-planning</a:t>
+            </a:r>
+          </a:p>
+          <a:p xmlns:a="http://schemas.openxmlformats.org/drawingml/2006/main">
+            <a:r>
+              <a:rPr lang="en-US" sz="1500" b="0">
+                <a:solidFill>
+                  <a:srgbClr val="1A202C"/>
+                </a:solidFill>
+                <a:latin typeface="Calibri"/>
+                <a:ea typeface="Calibri"/>
+              </a:rPr>
+              <a:t/>
+            </a:r>
+          </a:p>
+          <a:p xmlns:a="http://schemas.openxmlformats.org/drawingml/2006/main">
+            <a:r>
+              <a:rPr lang="en-US" sz="1500" b="0">
+                <a:solidFill>
+                  <a:srgbClr val="1A202C"/>
+                </a:solidFill>
+                <a:latin typeface="Calibri"/>
+                <a:ea typeface="Calibri"/>
+              </a:rPr>
+              <a:t>How to use: copy section order and decision verbs; replace with your metrics.</a:t>
+            </a:r>
+          </a:p>
+          <a:p xmlns:a="http://schemas.openxmlformats.org/drawingml/2006/main">
+            <a:r>
+              <a:rPr lang="en-US" sz="1500" b="0">
+                <a:solidFill>
+                  <a:srgbClr val="1A202C"/>
+                </a:solidFill>
+                <a:latin typeface="Calibri"/>
+                <a:ea typeface="Calibri"/>
+              </a:rPr>
+              <a:t>In-repo: skills/presentations/classic-public-cases.md</a:t>
+            </a:r>
+          </a:p>
+        </p:txBody>
+      </p:sp>
+      <p:sp>
+        <p:nvSpPr>
+          <p:cNvPr id="100008" name="TextBox 4"/>
+          <p:cNvSpPr txBox="1"/>
+          <p:nvPr/>
+        </p:nvSpPr>
+        <p:spPr>
+          <a:xfrm xmlns:a="http://schemas.openxmlformats.org/drawingml/2006/main">
+            <a:off x="504000" y="6426000"/>
+            <a:ext cx="11088000" cy="306000"/>
+          </a:xfrm>
+          <a:prstGeom xmlns:a="http://schemas.openxmlformats.org/drawingml/2006/main" prst="rect">
+            <a:avLst/>
+          </a:prstGeom>
+        </p:spPr>
+        <p:txBody>
+          <a:bodyPr xmlns:a="http://schemas.openxmlformats.org/drawingml/2006/main"/>
+          <a:lstStyle xmlns:a="http://schemas.openxmlformats.org/drawingml/2006/main"/>
+          <a:p xmlns:a="http://schemas.openxmlformats.org/drawingml/2006/main">
+            <a:r>
+              <a:rPr lang="en-US" sz="1100" b="0">
+                <a:solidFill>
+                  <a:srgbClr val="718096"/>
+                </a:solidFill>
+                <a:latin typeface="Calibri"/>
+                <a:ea typeface="Calibri"/>
+              </a:rPr>
+              <a:t>Team X  ·  Program Alpha  ·  Qn YYYY  ·  TEMPLATE — replace placeholders</a:t>
+            </a:r>
+          </a:p>
+        </p:txBody>
+      </p:sp>
+    </p:spTree>
+  </p:cSld>
+</p:sld>
+</file>
+
+<file path=ppt/slides/slide3.xml><?xml version="1.0" encoding="utf-8"?>
 <p:sld xmlns:p="http://schemas.openxmlformats.org/presentationml/2006/main">
   <p:cSld name="BLUF — purchase decision">
     <p:bg>
@@ -1223,7 +1584,7 @@
       <p:grpSpPr/>
       <p:sp>
         <p:nvSpPr>
-          <p:cNvPr id="100004" name="TextBox 1"/>
+          <p:cNvPr id="100009" name="TextBox 1"/>
           <p:cNvSpPr txBox="1"/>
           <p:nvPr/>
         </p:nvSpPr>
@@ -1255,7 +1616,7 @@
       </p:sp>
       <p:sp>
         <p:nvSpPr>
-          <p:cNvPr id="100005" name="TextBox 2"/>
+          <p:cNvPr id="100010" name="TextBox 2"/>
           <p:cNvSpPr txBox="1"/>
           <p:nvPr/>
         </p:nvSpPr>
@@ -1287,7 +1648,7 @@
       </p:sp>
       <p:sp>
         <p:nvSpPr>
-          <p:cNvPr id="100006" name="TextBox 3"/>
+          <p:cNvPr id="100011" name="TextBox 3"/>
           <p:cNvSpPr txBox="1"/>
           <p:nvPr/>
         </p:nvSpPr>
@@ -1322,7 +1683,7 @@
       </p:sp>
       <p:sp>
         <p:nvSpPr>
-          <p:cNvPr id="100007" name="TextBox 4"/>
+          <p:cNvPr id="100012" name="TextBox 4"/>
           <p:cNvSpPr txBox="1"/>
           <p:nvPr/>
         </p:nvSpPr>
@@ -1381,7 +1742,7 @@
       </p:sp>
       <p:sp>
         <p:nvSpPr>
-          <p:cNvPr id="100008" name="TextBox 5"/>
+          <p:cNvPr id="100013" name="TextBox 5"/>
           <p:cNvSpPr txBox="1"/>
           <p:nvPr/>
         </p:nvSpPr>
@@ -1416,7 +1777,7 @@
 </p:sld>
 </file>
 
-<file path=ppt/slides/slide3.xml><?xml version="1.0" encoding="utf-8"?>
+<file path=ppt/slides/slide4.xml><?xml version="1.0" encoding="utf-8"?>
 <p:sld xmlns:p="http://schemas.openxmlformats.org/presentationml/2006/main">
   <p:cSld name="Requirements (must / should)">
     <p:bg>
@@ -1435,7 +1796,7 @@
       <p:grpSpPr/>
       <p:sp>
         <p:nvSpPr>
-          <p:cNvPr id="100009" name="TextBox 1"/>
+          <p:cNvPr id="100014" name="TextBox 1"/>
           <p:cNvSpPr txBox="1"/>
           <p:nvPr/>
         </p:nvSpPr>
@@ -1467,7 +1828,7 @@
       </p:sp>
       <p:sp>
         <p:nvSpPr>
-          <p:cNvPr id="100010" name="TextBox 2"/>
+          <p:cNvPr id="100015" name="TextBox 2"/>
           <p:cNvSpPr txBox="1"/>
           <p:nvPr/>
         </p:nvSpPr>
@@ -1526,7 +1887,7 @@
       </p:sp>
       <p:sp>
         <p:nvSpPr>
-          <p:cNvPr id="100011" name="TextBox 3"/>
+          <p:cNvPr id="100016" name="TextBox 3"/>
           <p:cNvSpPr txBox="1"/>
           <p:nvPr/>
         </p:nvSpPr>
@@ -1561,7 +1922,7 @@
 </p:sld>
 </file>
 
-<file path=ppt/slides/slide4.xml><?xml version="1.0" encoding="utf-8"?>
+<file path=ppt/slides/slide5.xml><?xml version="1.0" encoding="utf-8"?>
 <p:sld xmlns:p="http://schemas.openxmlformats.org/presentationml/2006/main">
   <p:cSld name="Implementation plan">
     <p:bg>
@@ -1580,7 +1941,7 @@
       <p:grpSpPr/>
       <p:sp>
         <p:nvSpPr>
-          <p:cNvPr id="100012" name="TextBox 1"/>
+          <p:cNvPr id="100017" name="TextBox 1"/>
           <p:cNvSpPr txBox="1"/>
           <p:nvPr/>
         </p:nvSpPr>
@@ -1612,7 +1973,7 @@
       </p:sp>
       <p:sp>
         <p:nvSpPr>
-          <p:cNvPr id="100013" name="TextBox 2"/>
+          <p:cNvPr id="100018" name="TextBox 2"/>
           <p:cNvSpPr txBox="1"/>
           <p:nvPr/>
         </p:nvSpPr>
@@ -1659,7 +2020,7 @@
       </p:sp>
       <p:sp>
         <p:nvSpPr>
-          <p:cNvPr id="100014" name="TextBox 3"/>
+          <p:cNvPr id="100019" name="TextBox 3"/>
           <p:cNvSpPr txBox="1"/>
           <p:nvPr/>
         </p:nvSpPr>
@@ -1694,7 +2055,7 @@
 </p:sld>
 </file>
 
-<file path=ppt/slides/slide5.xml><?xml version="1.0" encoding="utf-8"?>
+<file path=ppt/slides/slide6.xml><?xml version="1.0" encoding="utf-8"?>
 <p:sld xmlns:p="http://schemas.openxmlformats.org/presentationml/2006/main">
   <p:cSld name="Options &amp; recommendation">
     <p:bg>
@@ -1713,7 +2074,7 @@
       <p:grpSpPr/>
       <p:sp>
         <p:nvSpPr>
-          <p:cNvPr id="100015" name="TextBox 1"/>
+          <p:cNvPr id="100020" name="TextBox 1"/>
           <p:cNvSpPr txBox="1"/>
           <p:nvPr/>
         </p:nvSpPr>
@@ -1745,7 +2106,7 @@
       </p:sp>
       <p:sp>
         <p:nvSpPr>
-          <p:cNvPr id="100016" name="TextBox 2"/>
+          <p:cNvPr id="100021" name="TextBox 2"/>
           <p:cNvSpPr txBox="1"/>
           <p:nvPr/>
         </p:nvSpPr>
@@ -1777,7 +2138,7 @@
       </p:sp>
       <p:graphicFrame>
         <p:nvGraphicFramePr>
-          <p:cNvPr id="100017" name="Table 1"/>
+          <p:cNvPr id="100022" name="Table 1"/>
           <p:cNvGraphicFramePr/>
           <p:nvPr/>
         </p:nvGraphicFramePr>
@@ -2270,7 +2631,7 @@
       </p:graphicFrame>
       <p:sp>
         <p:nvSpPr>
-          <p:cNvPr id="100018" name="TextBox 3"/>
+          <p:cNvPr id="100023" name="TextBox 3"/>
           <p:cNvSpPr txBox="1"/>
           <p:nvPr/>
         </p:nvSpPr>
@@ -2305,7 +2666,7 @@
 </p:sld>
 </file>
 
-<file path=ppt/slides/slide6.xml><?xml version="1.0" encoding="utf-8"?>
+<file path=ppt/slides/slide7.xml><?xml version="1.0" encoding="utf-8"?>
 <p:sld xmlns:p="http://schemas.openxmlformats.org/presentationml/2006/main">
   <p:cSld name="Decision &amp; ask">
     <p:bg>
@@ -2324,7 +2685,7 @@
       <p:grpSpPr/>
       <p:sp>
         <p:nvSpPr>
-          <p:cNvPr id="100019" name="TextBox 1"/>
+          <p:cNvPr id="100024" name="TextBox 1"/>
           <p:cNvSpPr txBox="1"/>
           <p:nvPr/>
         </p:nvSpPr>
@@ -2356,7 +2717,7 @@
       </p:sp>
       <p:sp>
         <p:nvSpPr>
-          <p:cNvPr id="100020" name="TextBox 2"/>
+          <p:cNvPr id="100025" name="TextBox 2"/>
           <p:cNvSpPr txBox="1"/>
           <p:nvPr/>
         </p:nvSpPr>
@@ -2388,7 +2749,7 @@
       </p:sp>
       <p:sp>
         <p:nvSpPr>
-          <p:cNvPr id="100021" name="TextBox 3"/>
+          <p:cNvPr id="100026" name="TextBox 3"/>
           <p:cNvSpPr txBox="1"/>
           <p:nvPr/>
         </p:nvSpPr>
@@ -2447,7 +2808,7 @@
       </p:sp>
       <p:sp>
         <p:nvSpPr>
-          <p:cNvPr id="100022" name="TextBox 4"/>
+          <p:cNvPr id="100027" name="TextBox 4"/>
           <p:cNvSpPr txBox="1"/>
           <p:nvPr/>
         </p:nvSpPr>

--- a/skills/presentations/assets/pptx/templates/05-procurement-proposal.pptx
+++ b/skills/presentations/assets/pptx/templates/05-procurement-proposal.pptx
@@ -5,16 +5,16 @@
     <p:sldMasterId xmlns:r="http://schemas.openxmlformats.org/officeDocument/2006/relationships" id="2147483648" r:id="rId1"/>
   </p:sldMasterIdLst>
   <p:notesMasterIdLst>
-    <p:notesMasterId r:id="R01ce6cbc5c384df2"/>
+    <p:notesMasterId r:id="R911f378345d0451e"/>
   </p:notesMasterIdLst>
   <p:sldIdLst>
-    <p:sldId id="256" r:id="R24bdff5cd3d24af9"/>
-    <p:sldId id="257" r:id="Ref721088bfaa423a"/>
-    <p:sldId id="258" r:id="Rcd0cc0f103ec4fef"/>
-    <p:sldId id="259" r:id="Rc24cd4e228c945da"/>
-    <p:sldId id="260" r:id="Rd7ab62c974c74663"/>
-    <p:sldId id="261" r:id="R00c6cf6de7514917"/>
-    <p:sldId id="262" r:id="R954d1ad311fd4c59"/>
+    <p:sldId id="256" r:id="R04561f7adbb04847"/>
+    <p:sldId id="257" r:id="Rf6a0945a2e784da6"/>
+    <p:sldId id="258" r:id="R79df6ec595604910"/>
+    <p:sldId id="259" r:id="R8345e80be824495c"/>
+    <p:sldId id="260" r:id="R9e53194244ad4da1"/>
+    <p:sldId id="261" r:id="R97323825e1b94272"/>
+    <p:sldId id="262" r:id="R5459f8220f9d46bd"/>
   </p:sldIdLst>
   <p:sldSz cx="12192000" cy="6858000"/>
   <p:notesSz cx="6858000" cy="9144000"/>
@@ -1523,7 +1523,19 @@
                 <a:latin typeface="Calibri"/>
                 <a:ea typeface="Calibri"/>
               </a:rPr>
-              <a:t>In-repo: skills/presentations/classic-public-cases.md</a:t>
+              <a:t>CONTENT TEMPLATE ONLY — do not copy visual design (colors, margins, fonts) as a brand system.</a:t>
+            </a:r>
+          </a:p>
+          <a:p xmlns:a="http://schemas.openxmlformats.org/drawingml/2006/main">
+            <a:r>
+              <a:rPr lang="en-US" sz="1500" b="0">
+                <a:solidFill>
+                  <a:srgbClr val="1A202C"/>
+                </a:solidFill>
+                <a:latin typeface="Calibri"/>
+                <a:ea typeface="Calibri"/>
+              </a:rPr>
+              <a:t>In-repo: skills/presentations/classic-public-cases.md · assets/README.md (agent notice)</a:t>
             </a:r>
           </a:p>
         </p:txBody>
